--- a/frontend/public/documentation/Flyer.pptx
+++ b/frontend/public/documentation/Flyer.pptx
@@ -9,8 +9,9 @@
     <p:sldId id="265" r:id="rId3"/>
     <p:sldId id="259" r:id="rId4"/>
     <p:sldId id="262" r:id="rId5"/>
-    <p:sldId id="263" r:id="rId6"/>
-    <p:sldId id="264" r:id="rId7"/>
+    <p:sldId id="266" r:id="rId6"/>
+    <p:sldId id="263" r:id="rId7"/>
+    <p:sldId id="264" r:id="rId8"/>
   </p:sldIdLst>
   <p:sldSz cx="6858000" cy="12192000"/>
   <p:notesSz cx="6858000" cy="9144000"/>
@@ -248,7 +249,7 @@
           <a:p>
             <a:fld id="{D4B1C55F-B20C-4CFD-8E60-86901ABAE181}" type="datetimeFigureOut">
               <a:rPr lang="fr-BE" smtClean="0"/>
-              <a:t>04-06-25</a:t>
+              <a:t>17-06-25</a:t>
             </a:fld>
             <a:endParaRPr lang="fr-BE"/>
           </a:p>
@@ -418,7 +419,7 @@
           <a:p>
             <a:fld id="{D4B1C55F-B20C-4CFD-8E60-86901ABAE181}" type="datetimeFigureOut">
               <a:rPr lang="fr-BE" smtClean="0"/>
-              <a:t>04-06-25</a:t>
+              <a:t>17-06-25</a:t>
             </a:fld>
             <a:endParaRPr lang="fr-BE"/>
           </a:p>
@@ -598,7 +599,7 @@
           <a:p>
             <a:fld id="{D4B1C55F-B20C-4CFD-8E60-86901ABAE181}" type="datetimeFigureOut">
               <a:rPr lang="fr-BE" smtClean="0"/>
-              <a:t>04-06-25</a:t>
+              <a:t>17-06-25</a:t>
             </a:fld>
             <a:endParaRPr lang="fr-BE"/>
           </a:p>
@@ -768,7 +769,7 @@
           <a:p>
             <a:fld id="{D4B1C55F-B20C-4CFD-8E60-86901ABAE181}" type="datetimeFigureOut">
               <a:rPr lang="fr-BE" smtClean="0"/>
-              <a:t>04-06-25</a:t>
+              <a:t>17-06-25</a:t>
             </a:fld>
             <a:endParaRPr lang="fr-BE"/>
           </a:p>
@@ -1014,7 +1015,7 @@
           <a:p>
             <a:fld id="{D4B1C55F-B20C-4CFD-8E60-86901ABAE181}" type="datetimeFigureOut">
               <a:rPr lang="fr-BE" smtClean="0"/>
-              <a:t>04-06-25</a:t>
+              <a:t>17-06-25</a:t>
             </a:fld>
             <a:endParaRPr lang="fr-BE"/>
           </a:p>
@@ -1246,7 +1247,7 @@
           <a:p>
             <a:fld id="{D4B1C55F-B20C-4CFD-8E60-86901ABAE181}" type="datetimeFigureOut">
               <a:rPr lang="fr-BE" smtClean="0"/>
-              <a:t>04-06-25</a:t>
+              <a:t>17-06-25</a:t>
             </a:fld>
             <a:endParaRPr lang="fr-BE"/>
           </a:p>
@@ -1613,7 +1614,7 @@
           <a:p>
             <a:fld id="{D4B1C55F-B20C-4CFD-8E60-86901ABAE181}" type="datetimeFigureOut">
               <a:rPr lang="fr-BE" smtClean="0"/>
-              <a:t>04-06-25</a:t>
+              <a:t>17-06-25</a:t>
             </a:fld>
             <a:endParaRPr lang="fr-BE"/>
           </a:p>
@@ -1731,7 +1732,7 @@
           <a:p>
             <a:fld id="{D4B1C55F-B20C-4CFD-8E60-86901ABAE181}" type="datetimeFigureOut">
               <a:rPr lang="fr-BE" smtClean="0"/>
-              <a:t>04-06-25</a:t>
+              <a:t>17-06-25</a:t>
             </a:fld>
             <a:endParaRPr lang="fr-BE"/>
           </a:p>
@@ -1826,7 +1827,7 @@
           <a:p>
             <a:fld id="{D4B1C55F-B20C-4CFD-8E60-86901ABAE181}" type="datetimeFigureOut">
               <a:rPr lang="fr-BE" smtClean="0"/>
-              <a:t>04-06-25</a:t>
+              <a:t>17-06-25</a:t>
             </a:fld>
             <a:endParaRPr lang="fr-BE"/>
           </a:p>
@@ -2103,7 +2104,7 @@
           <a:p>
             <a:fld id="{D4B1C55F-B20C-4CFD-8E60-86901ABAE181}" type="datetimeFigureOut">
               <a:rPr lang="fr-BE" smtClean="0"/>
-              <a:t>04-06-25</a:t>
+              <a:t>17-06-25</a:t>
             </a:fld>
             <a:endParaRPr lang="fr-BE"/>
           </a:p>
@@ -2360,7 +2361,7 @@
           <a:p>
             <a:fld id="{D4B1C55F-B20C-4CFD-8E60-86901ABAE181}" type="datetimeFigureOut">
               <a:rPr lang="fr-BE" smtClean="0"/>
-              <a:t>04-06-25</a:t>
+              <a:t>17-06-25</a:t>
             </a:fld>
             <a:endParaRPr lang="fr-BE"/>
           </a:p>
@@ -2573,7 +2574,7 @@
           <a:p>
             <a:fld id="{D4B1C55F-B20C-4CFD-8E60-86901ABAE181}" type="datetimeFigureOut">
               <a:rPr lang="fr-BE" smtClean="0"/>
-              <a:t>04-06-25</a:t>
+              <a:t>17-06-25</a:t>
             </a:fld>
             <a:endParaRPr lang="fr-BE"/>
           </a:p>
@@ -3463,7 +3464,7 @@
                   <a:schemeClr val="accent1"/>
                 </a:solidFill>
               </a:rPr>
-              <a:t>Launched</a:t>
+              <a:t>New version</a:t>
             </a:r>
             <a:r>
               <a:rPr lang="en-US" noProof="0" dirty="0">
@@ -5787,6 +5788,441 @@
         <p:cNvPr id="1" name="">
           <a:extLst>
             <a:ext uri="{FF2B5EF4-FFF2-40B4-BE49-F238E27FC236}">
+              <a16:creationId xmlns:a16="http://schemas.microsoft.com/office/drawing/2014/main" id="{410EA006-7851-E6E5-C969-C39C97CEDA0B}"/>
+            </a:ext>
+          </a:extLst>
+        </p:cNvPr>
+        <p:cNvGrpSpPr/>
+        <p:nvPr/>
+      </p:nvGrpSpPr>
+      <p:grpSpPr>
+        <a:xfrm>
+          <a:off x="0" y="0"/>
+          <a:ext cx="0" cy="0"/>
+          <a:chOff x="0" y="0"/>
+          <a:chExt cx="0" cy="0"/>
+        </a:xfrm>
+      </p:grpSpPr>
+      <p:sp>
+        <p:nvSpPr>
+          <p:cNvPr id="4" name="Rectangle 3">
+            <a:extLst>
+              <a:ext uri="{FF2B5EF4-FFF2-40B4-BE49-F238E27FC236}">
+                <a16:creationId xmlns:a16="http://schemas.microsoft.com/office/drawing/2014/main" id="{1FED101D-82E2-E261-7137-735DA03C9E52}"/>
+              </a:ext>
+            </a:extLst>
+          </p:cNvPr>
+          <p:cNvSpPr/>
+          <p:nvPr/>
+        </p:nvSpPr>
+        <p:spPr>
+          <a:xfrm>
+            <a:off x="0" y="312821"/>
+            <a:ext cx="6858000" cy="2960731"/>
+          </a:xfrm>
+          <a:prstGeom prst="rect">
+            <a:avLst/>
+          </a:prstGeom>
+          <a:solidFill>
+            <a:srgbClr val="D4EDF8"/>
+          </a:solidFill>
+          <a:ln>
+            <a:noFill/>
+          </a:ln>
+        </p:spPr>
+        <p:style>
+          <a:lnRef idx="2">
+            <a:schemeClr val="accent1">
+              <a:shade val="15000"/>
+            </a:schemeClr>
+          </a:lnRef>
+          <a:fillRef idx="1">
+            <a:schemeClr val="accent1"/>
+          </a:fillRef>
+          <a:effectRef idx="0">
+            <a:schemeClr val="accent1"/>
+          </a:effectRef>
+          <a:fontRef idx="minor">
+            <a:schemeClr val="lt1"/>
+          </a:fontRef>
+        </p:style>
+        <p:txBody>
+          <a:bodyPr rtlCol="0" anchor="ctr"/>
+          <a:lstStyle/>
+          <a:p>
+            <a:pPr algn="ctr"/>
+            <a:endParaRPr lang="fr-BE"/>
+          </a:p>
+        </p:txBody>
+      </p:sp>
+      <p:sp>
+        <p:nvSpPr>
+          <p:cNvPr id="10" name="Rectangle 9">
+            <a:extLst>
+              <a:ext uri="{FF2B5EF4-FFF2-40B4-BE49-F238E27FC236}">
+                <a16:creationId xmlns:a16="http://schemas.microsoft.com/office/drawing/2014/main" id="{3D9D700D-EA44-F4B3-F158-6E3142D8662F}"/>
+              </a:ext>
+            </a:extLst>
+          </p:cNvPr>
+          <p:cNvSpPr/>
+          <p:nvPr/>
+        </p:nvSpPr>
+        <p:spPr>
+          <a:xfrm>
+            <a:off x="256032" y="0"/>
+            <a:ext cx="2779776" cy="312821"/>
+          </a:xfrm>
+          <a:prstGeom prst="rect">
+            <a:avLst/>
+          </a:prstGeom>
+          <a:solidFill>
+            <a:schemeClr val="bg1">
+              <a:lumMod val="85000"/>
+            </a:schemeClr>
+          </a:solidFill>
+          <a:ln>
+            <a:noFill/>
+          </a:ln>
+        </p:spPr>
+        <p:style>
+          <a:lnRef idx="2">
+            <a:schemeClr val="accent1">
+              <a:shade val="15000"/>
+            </a:schemeClr>
+          </a:lnRef>
+          <a:fillRef idx="1">
+            <a:schemeClr val="accent1"/>
+          </a:fillRef>
+          <a:effectRef idx="0">
+            <a:schemeClr val="accent1"/>
+          </a:effectRef>
+          <a:fontRef idx="minor">
+            <a:schemeClr val="lt1"/>
+          </a:fontRef>
+        </p:style>
+        <p:txBody>
+          <a:bodyPr rtlCol="0" anchor="ctr"/>
+          <a:lstStyle/>
+          <a:p>
+            <a:pPr algn="ctr"/>
+            <a:endParaRPr lang="fr-BE"/>
+          </a:p>
+        </p:txBody>
+      </p:sp>
+      <p:sp>
+        <p:nvSpPr>
+          <p:cNvPr id="13" name="TextBox 12">
+            <a:extLst>
+              <a:ext uri="{FF2B5EF4-FFF2-40B4-BE49-F238E27FC236}">
+                <a16:creationId xmlns:a16="http://schemas.microsoft.com/office/drawing/2014/main" id="{AE7D3618-988D-1922-93E4-3396B25BB9F8}"/>
+              </a:ext>
+            </a:extLst>
+          </p:cNvPr>
+          <p:cNvSpPr txBox="1"/>
+          <p:nvPr/>
+        </p:nvSpPr>
+        <p:spPr>
+          <a:xfrm>
+            <a:off x="3035808" y="593710"/>
+            <a:ext cx="3822192" cy="523220"/>
+          </a:xfrm>
+          <a:prstGeom prst="rect">
+            <a:avLst/>
+          </a:prstGeom>
+          <a:noFill/>
+        </p:spPr>
+        <p:txBody>
+          <a:bodyPr wrap="square" rtlCol="0">
+            <a:spAutoFit/>
+          </a:bodyPr>
+          <a:lstStyle/>
+          <a:p>
+            <a:pPr algn="ctr"/>
+            <a:r>
+              <a:rPr lang="en-US" sz="2800" b="1" noProof="0" dirty="0">
+                <a:solidFill>
+                  <a:schemeClr val="accent1"/>
+                </a:solidFill>
+              </a:rPr>
+              <a:t>Automated Tests Tool</a:t>
+            </a:r>
+          </a:p>
+        </p:txBody>
+      </p:sp>
+      <p:sp>
+        <p:nvSpPr>
+          <p:cNvPr id="15" name="TextBox 14">
+            <a:extLst>
+              <a:ext uri="{FF2B5EF4-FFF2-40B4-BE49-F238E27FC236}">
+                <a16:creationId xmlns:a16="http://schemas.microsoft.com/office/drawing/2014/main" id="{C91CC1A2-132D-AF67-C00E-E451EA462839}"/>
+              </a:ext>
+            </a:extLst>
+          </p:cNvPr>
+          <p:cNvSpPr txBox="1"/>
+          <p:nvPr/>
+        </p:nvSpPr>
+        <p:spPr>
+          <a:xfrm>
+            <a:off x="3291839" y="1197567"/>
+            <a:ext cx="3566161" cy="1200329"/>
+          </a:xfrm>
+          <a:prstGeom prst="rect">
+            <a:avLst/>
+          </a:prstGeom>
+          <a:noFill/>
+        </p:spPr>
+        <p:txBody>
+          <a:bodyPr wrap="square" rtlCol="0">
+            <a:spAutoFit/>
+          </a:bodyPr>
+          <a:lstStyle/>
+          <a:p>
+            <a:r>
+              <a:rPr lang="en-US" i="1" noProof="0" dirty="0">
+                <a:solidFill>
+                  <a:schemeClr val="accent1"/>
+                </a:solidFill>
+              </a:rPr>
+              <a:t>No technical skill is required to create a scenario, just select a function in the set and fill the  parameters.</a:t>
+            </a:r>
+          </a:p>
+        </p:txBody>
+      </p:sp>
+      <p:sp>
+        <p:nvSpPr>
+          <p:cNvPr id="3" name="TextBox 2">
+            <a:extLst>
+              <a:ext uri="{FF2B5EF4-FFF2-40B4-BE49-F238E27FC236}">
+                <a16:creationId xmlns:a16="http://schemas.microsoft.com/office/drawing/2014/main" id="{D3924C83-2B42-F73E-6E4E-1A2FEBF5E001}"/>
+              </a:ext>
+            </a:extLst>
+          </p:cNvPr>
+          <p:cNvSpPr txBox="1"/>
+          <p:nvPr/>
+        </p:nvSpPr>
+        <p:spPr>
+          <a:xfrm>
+            <a:off x="108031" y="3697034"/>
+            <a:ext cx="2204185" cy="369332"/>
+          </a:xfrm>
+          <a:prstGeom prst="rect">
+            <a:avLst/>
+          </a:prstGeom>
+          <a:noFill/>
+        </p:spPr>
+        <p:txBody>
+          <a:bodyPr wrap="square" rtlCol="0">
+            <a:spAutoFit/>
+          </a:bodyPr>
+          <a:lstStyle/>
+          <a:p>
+            <a:r>
+              <a:rPr lang="fr-BE" b="1" dirty="0">
+                <a:solidFill>
+                  <a:schemeClr val="accent1"/>
+                </a:solidFill>
+              </a:rPr>
+              <a:t>DESIGNER</a:t>
+            </a:r>
+          </a:p>
+        </p:txBody>
+      </p:sp>
+      <p:sp>
+        <p:nvSpPr>
+          <p:cNvPr id="24" name="TextBox 23">
+            <a:extLst>
+              <a:ext uri="{FF2B5EF4-FFF2-40B4-BE49-F238E27FC236}">
+                <a16:creationId xmlns:a16="http://schemas.microsoft.com/office/drawing/2014/main" id="{6F2C13D3-EFAF-17B9-DEBB-F3189ADA5535}"/>
+              </a:ext>
+            </a:extLst>
+          </p:cNvPr>
+          <p:cNvSpPr txBox="1"/>
+          <p:nvPr/>
+        </p:nvSpPr>
+        <p:spPr>
+          <a:xfrm>
+            <a:off x="108031" y="4060702"/>
+            <a:ext cx="2204185" cy="338554"/>
+          </a:xfrm>
+          <a:prstGeom prst="rect">
+            <a:avLst/>
+          </a:prstGeom>
+          <a:noFill/>
+        </p:spPr>
+        <p:txBody>
+          <a:bodyPr wrap="square" rtlCol="0">
+            <a:spAutoFit/>
+          </a:bodyPr>
+          <a:lstStyle>
+            <a:defPPr>
+              <a:defRPr lang="en-US"/>
+            </a:defPPr>
+            <a:lvl1pPr>
+              <a:defRPr sz="1600" b="1" i="1">
+                <a:solidFill>
+                  <a:schemeClr val="accent1"/>
+                </a:solidFill>
+              </a:defRPr>
+            </a:lvl1pPr>
+          </a:lstStyle>
+          <a:p>
+            <a:r>
+              <a:rPr lang="en-US" noProof="0" dirty="0"/>
+              <a:t>Select a function:</a:t>
+            </a:r>
+          </a:p>
+        </p:txBody>
+      </p:sp>
+      <p:sp>
+        <p:nvSpPr>
+          <p:cNvPr id="27" name="TextBox 26">
+            <a:extLst>
+              <a:ext uri="{FF2B5EF4-FFF2-40B4-BE49-F238E27FC236}">
+                <a16:creationId xmlns:a16="http://schemas.microsoft.com/office/drawing/2014/main" id="{19C7F51E-0C03-B500-0973-49593600B863}"/>
+              </a:ext>
+            </a:extLst>
+          </p:cNvPr>
+          <p:cNvSpPr txBox="1"/>
+          <p:nvPr/>
+        </p:nvSpPr>
+        <p:spPr>
+          <a:xfrm>
+            <a:off x="108031" y="7924314"/>
+            <a:ext cx="3183808" cy="338554"/>
+          </a:xfrm>
+          <a:prstGeom prst="rect">
+            <a:avLst/>
+          </a:prstGeom>
+          <a:noFill/>
+        </p:spPr>
+        <p:txBody>
+          <a:bodyPr wrap="square" rtlCol="0">
+            <a:spAutoFit/>
+          </a:bodyPr>
+          <a:lstStyle/>
+          <a:p>
+            <a:r>
+              <a:rPr lang="en-US" sz="1600" b="1" i="1" noProof="0" dirty="0">
+                <a:solidFill>
+                  <a:schemeClr val="accent1"/>
+                </a:solidFill>
+              </a:rPr>
+              <a:t>Fill the parameters:</a:t>
+            </a:r>
+          </a:p>
+        </p:txBody>
+      </p:sp>
+      <p:pic>
+        <p:nvPicPr>
+          <p:cNvPr id="5" name="Picture 4">
+            <a:extLst>
+              <a:ext uri="{FF2B5EF4-FFF2-40B4-BE49-F238E27FC236}">
+                <a16:creationId xmlns:a16="http://schemas.microsoft.com/office/drawing/2014/main" id="{159E7A30-4FFF-C2CD-7BB3-D7B5B54222C7}"/>
+              </a:ext>
+            </a:extLst>
+          </p:cNvPr>
+          <p:cNvPicPr>
+            <a:picLocks noChangeAspect="1"/>
+          </p:cNvPicPr>
+          <p:nvPr/>
+        </p:nvPicPr>
+        <p:blipFill>
+          <a:blip r:embed="rId2"/>
+          <a:stretch>
+            <a:fillRect/>
+          </a:stretch>
+        </p:blipFill>
+        <p:spPr>
+          <a:xfrm>
+            <a:off x="123068" y="429792"/>
+            <a:ext cx="2860751" cy="2585323"/>
+          </a:xfrm>
+          <a:prstGeom prst="rect">
+            <a:avLst/>
+          </a:prstGeom>
+        </p:spPr>
+      </p:pic>
+      <p:pic>
+        <p:nvPicPr>
+          <p:cNvPr id="8" name="Picture 7">
+            <a:extLst>
+              <a:ext uri="{FF2B5EF4-FFF2-40B4-BE49-F238E27FC236}">
+                <a16:creationId xmlns:a16="http://schemas.microsoft.com/office/drawing/2014/main" id="{97021679-75A3-79DF-4A69-16D15167E09C}"/>
+              </a:ext>
+            </a:extLst>
+          </p:cNvPr>
+          <p:cNvPicPr>
+            <a:picLocks noChangeAspect="1"/>
+          </p:cNvPicPr>
+          <p:nvPr/>
+        </p:nvPicPr>
+        <p:blipFill>
+          <a:blip r:embed="rId3"/>
+          <a:stretch>
+            <a:fillRect/>
+          </a:stretch>
+        </p:blipFill>
+        <p:spPr>
+          <a:xfrm>
+            <a:off x="74807" y="4394189"/>
+            <a:ext cx="6643007" cy="3499871"/>
+          </a:xfrm>
+          <a:prstGeom prst="rect">
+            <a:avLst/>
+          </a:prstGeom>
+        </p:spPr>
+      </p:pic>
+      <p:pic>
+        <p:nvPicPr>
+          <p:cNvPr id="12" name="Picture 11">
+            <a:extLst>
+              <a:ext uri="{FF2B5EF4-FFF2-40B4-BE49-F238E27FC236}">
+                <a16:creationId xmlns:a16="http://schemas.microsoft.com/office/drawing/2014/main" id="{66CB92CE-CDE1-12DF-B2BE-B28EABAC65FF}"/>
+              </a:ext>
+            </a:extLst>
+          </p:cNvPr>
+          <p:cNvPicPr>
+            <a:picLocks noChangeAspect="1"/>
+          </p:cNvPicPr>
+          <p:nvPr/>
+        </p:nvPicPr>
+        <p:blipFill>
+          <a:blip r:embed="rId4"/>
+          <a:stretch>
+            <a:fillRect/>
+          </a:stretch>
+        </p:blipFill>
+        <p:spPr>
+          <a:xfrm>
+            <a:off x="123068" y="8419834"/>
+            <a:ext cx="6594746" cy="3342374"/>
+          </a:xfrm>
+          <a:prstGeom prst="rect">
+            <a:avLst/>
+          </a:prstGeom>
+        </p:spPr>
+      </p:pic>
+    </p:spTree>
+    <p:extLst>
+      <p:ext uri="{BB962C8B-B14F-4D97-AF65-F5344CB8AC3E}">
+        <p14:creationId xmlns:p14="http://schemas.microsoft.com/office/powerpoint/2010/main" val="3032870823"/>
+      </p:ext>
+    </p:extLst>
+  </p:cSld>
+  <p:clrMapOvr>
+    <a:masterClrMapping/>
+  </p:clrMapOvr>
+</p:sld>
+</file>
+
+<file path=ppt/slides/slide6.xml><?xml version="1.0" encoding="utf-8"?>
+<p:sld xmlns:a="http://schemas.openxmlformats.org/drawingml/2006/main" xmlns:r="http://schemas.openxmlformats.org/officeDocument/2006/relationships" xmlns:p="http://schemas.openxmlformats.org/presentationml/2006/main">
+  <p:cSld>
+    <p:spTree>
+      <p:nvGrpSpPr>
+        <p:cNvPr id="1" name="">
+          <a:extLst>
+            <a:ext uri="{FF2B5EF4-FFF2-40B4-BE49-F238E27FC236}">
               <a16:creationId xmlns:a16="http://schemas.microsoft.com/office/drawing/2014/main" id="{ADD1CFDD-5FF7-12C8-73CF-EBB21159A268}"/>
             </a:ext>
           </a:extLst>
@@ -6229,7 +6665,7 @@
 </p:sld>
 </file>
 
-<file path=ppt/slides/slide6.xml><?xml version="1.0" encoding="utf-8"?>
+<file path=ppt/slides/slide7.xml><?xml version="1.0" encoding="utf-8"?>
 <p:sld xmlns:a="http://schemas.openxmlformats.org/drawingml/2006/main" xmlns:r="http://schemas.openxmlformats.org/officeDocument/2006/relationships" xmlns:p="http://schemas.openxmlformats.org/presentationml/2006/main">
   <p:cSld>
     <p:spTree>

--- a/frontend/public/documentation/Flyer.pptx
+++ b/frontend/public/documentation/Flyer.pptx
@@ -10,8 +10,9 @@
     <p:sldId id="259" r:id="rId4"/>
     <p:sldId id="262" r:id="rId5"/>
     <p:sldId id="266" r:id="rId6"/>
-    <p:sldId id="263" r:id="rId7"/>
-    <p:sldId id="264" r:id="rId8"/>
+    <p:sldId id="267" r:id="rId7"/>
+    <p:sldId id="263" r:id="rId8"/>
+    <p:sldId id="264" r:id="rId9"/>
   </p:sldIdLst>
   <p:sldSz cx="6858000" cy="12192000"/>
   <p:notesSz cx="6858000" cy="9144000"/>
@@ -6223,7 +6224,7 @@
         <p:cNvPr id="1" name="">
           <a:extLst>
             <a:ext uri="{FF2B5EF4-FFF2-40B4-BE49-F238E27FC236}">
-              <a16:creationId xmlns:a16="http://schemas.microsoft.com/office/drawing/2014/main" id="{ADD1CFDD-5FF7-12C8-73CF-EBB21159A268}"/>
+              <a16:creationId xmlns:a16="http://schemas.microsoft.com/office/drawing/2014/main" id="{B425AD77-D11E-498F-9B96-7025CC560605}"/>
             </a:ext>
           </a:extLst>
         </p:cNvPr>
@@ -6243,7 +6244,7 @@
           <p:cNvPr id="4" name="Rectangle 3">
             <a:extLst>
               <a:ext uri="{FF2B5EF4-FFF2-40B4-BE49-F238E27FC236}">
-                <a16:creationId xmlns:a16="http://schemas.microsoft.com/office/drawing/2014/main" id="{94DFAE0C-794A-D0D5-490D-F6CF974225F3}"/>
+                <a16:creationId xmlns:a16="http://schemas.microsoft.com/office/drawing/2014/main" id="{C8CF0651-7D29-FEFD-8708-0A06B9EC32C9}"/>
               </a:ext>
             </a:extLst>
           </p:cNvPr>
@@ -6295,7 +6296,7 @@
           <p:cNvPr id="10" name="Rectangle 9">
             <a:extLst>
               <a:ext uri="{FF2B5EF4-FFF2-40B4-BE49-F238E27FC236}">
-                <a16:creationId xmlns:a16="http://schemas.microsoft.com/office/drawing/2014/main" id="{FF62D560-2EEA-3536-92B8-6A93C0F4C95C}"/>
+                <a16:creationId xmlns:a16="http://schemas.microsoft.com/office/drawing/2014/main" id="{74C7A5EF-60BA-57CB-AAF3-BF0F5D3D21F9}"/>
               </a:ext>
             </a:extLst>
           </p:cNvPr>
@@ -6349,6 +6350,620 @@
           <p:cNvPr id="13" name="TextBox 12">
             <a:extLst>
               <a:ext uri="{FF2B5EF4-FFF2-40B4-BE49-F238E27FC236}">
+                <a16:creationId xmlns:a16="http://schemas.microsoft.com/office/drawing/2014/main" id="{87CE4C6F-2A6D-4E3B-8335-B71B4E886015}"/>
+              </a:ext>
+            </a:extLst>
+          </p:cNvPr>
+          <p:cNvSpPr txBox="1"/>
+          <p:nvPr/>
+        </p:nvSpPr>
+        <p:spPr>
+          <a:xfrm>
+            <a:off x="3035808" y="593710"/>
+            <a:ext cx="3822192" cy="523220"/>
+          </a:xfrm>
+          <a:prstGeom prst="rect">
+            <a:avLst/>
+          </a:prstGeom>
+          <a:noFill/>
+        </p:spPr>
+        <p:txBody>
+          <a:bodyPr wrap="square" rtlCol="0">
+            <a:spAutoFit/>
+          </a:bodyPr>
+          <a:lstStyle/>
+          <a:p>
+            <a:pPr algn="ctr"/>
+            <a:r>
+              <a:rPr lang="en-US" sz="2800" b="1" noProof="0" dirty="0">
+                <a:solidFill>
+                  <a:schemeClr val="accent1"/>
+                </a:solidFill>
+              </a:rPr>
+              <a:t>Automated Tests Tool</a:t>
+            </a:r>
+          </a:p>
+        </p:txBody>
+      </p:sp>
+      <p:sp>
+        <p:nvSpPr>
+          <p:cNvPr id="15" name="TextBox 14">
+            <a:extLst>
+              <a:ext uri="{FF2B5EF4-FFF2-40B4-BE49-F238E27FC236}">
+                <a16:creationId xmlns:a16="http://schemas.microsoft.com/office/drawing/2014/main" id="{1A52AAC9-EAA1-EA64-8B4E-4314B50ED10B}"/>
+              </a:ext>
+            </a:extLst>
+          </p:cNvPr>
+          <p:cNvSpPr txBox="1"/>
+          <p:nvPr/>
+        </p:nvSpPr>
+        <p:spPr>
+          <a:xfrm>
+            <a:off x="3291839" y="1197567"/>
+            <a:ext cx="3566161" cy="1754326"/>
+          </a:xfrm>
+          <a:prstGeom prst="rect">
+            <a:avLst/>
+          </a:prstGeom>
+          <a:noFill/>
+        </p:spPr>
+        <p:txBody>
+          <a:bodyPr wrap="square" rtlCol="0">
+            <a:spAutoFit/>
+          </a:bodyPr>
+          <a:lstStyle/>
+          <a:p>
+            <a:r>
+              <a:rPr lang="en-US" i="1" noProof="0" dirty="0">
+                <a:solidFill>
+                  <a:schemeClr val="accent1"/>
+                </a:solidFill>
+              </a:rPr>
+              <a:t>After the execution, a logfile can be consulted to check the execution of all the steps.</a:t>
+            </a:r>
+            <a:br>
+              <a:rPr lang="en-US" i="1" noProof="0" dirty="0">
+                <a:solidFill>
+                  <a:schemeClr val="accent1"/>
+                </a:solidFill>
+              </a:rPr>
+            </a:br>
+            <a:br>
+              <a:rPr lang="en-US" i="1" noProof="0" dirty="0">
+                <a:solidFill>
+                  <a:schemeClr val="accent1"/>
+                </a:solidFill>
+              </a:rPr>
+            </a:br>
+            <a:r>
+              <a:rPr lang="en-US" i="1" noProof="0" dirty="0">
+                <a:solidFill>
+                  <a:schemeClr val="accent1"/>
+                </a:solidFill>
+              </a:rPr>
+              <a:t>(*) </a:t>
+            </a:r>
+            <a:r>
+              <a:rPr lang="en-US" i="1" u="sng" noProof="0" dirty="0">
+                <a:solidFill>
+                  <a:schemeClr val="accent1"/>
+                </a:solidFill>
+              </a:rPr>
+              <a:t>Note:</a:t>
+            </a:r>
+            <a:r>
+              <a:rPr lang="en-US" i="1" noProof="0" dirty="0">
+                <a:solidFill>
+                  <a:schemeClr val="accent1"/>
+                </a:solidFill>
+              </a:rPr>
+              <a:t> For the Tester, a simplify version of the logfile is displayed</a:t>
+            </a:r>
+          </a:p>
+        </p:txBody>
+      </p:sp>
+      <p:sp>
+        <p:nvSpPr>
+          <p:cNvPr id="3" name="TextBox 2">
+            <a:extLst>
+              <a:ext uri="{FF2B5EF4-FFF2-40B4-BE49-F238E27FC236}">
+                <a16:creationId xmlns:a16="http://schemas.microsoft.com/office/drawing/2014/main" id="{D0AEA02A-171C-EFEB-EABB-B5BD82983881}"/>
+              </a:ext>
+            </a:extLst>
+          </p:cNvPr>
+          <p:cNvSpPr txBox="1"/>
+          <p:nvPr/>
+        </p:nvSpPr>
+        <p:spPr>
+          <a:xfrm>
+            <a:off x="108031" y="3697034"/>
+            <a:ext cx="6626901" cy="369332"/>
+          </a:xfrm>
+          <a:prstGeom prst="rect">
+            <a:avLst/>
+          </a:prstGeom>
+          <a:noFill/>
+        </p:spPr>
+        <p:txBody>
+          <a:bodyPr wrap="square" rtlCol="0">
+            <a:spAutoFit/>
+          </a:bodyPr>
+          <a:lstStyle/>
+          <a:p>
+            <a:pPr algn="ctr"/>
+            <a:r>
+              <a:rPr lang="fr-BE" b="1" dirty="0">
+                <a:solidFill>
+                  <a:schemeClr val="accent1"/>
+                </a:solidFill>
+              </a:rPr>
+              <a:t>DESIGNER / TESTER(*)</a:t>
+            </a:r>
+          </a:p>
+        </p:txBody>
+      </p:sp>
+      <p:sp>
+        <p:nvSpPr>
+          <p:cNvPr id="24" name="TextBox 23">
+            <a:extLst>
+              <a:ext uri="{FF2B5EF4-FFF2-40B4-BE49-F238E27FC236}">
+                <a16:creationId xmlns:a16="http://schemas.microsoft.com/office/drawing/2014/main" id="{5D2BEE63-7A0E-FE6B-A48C-3D84093F5405}"/>
+              </a:ext>
+            </a:extLst>
+          </p:cNvPr>
+          <p:cNvSpPr txBox="1"/>
+          <p:nvPr/>
+        </p:nvSpPr>
+        <p:spPr>
+          <a:xfrm>
+            <a:off x="108031" y="4060702"/>
+            <a:ext cx="2204185" cy="338554"/>
+          </a:xfrm>
+          <a:prstGeom prst="rect">
+            <a:avLst/>
+          </a:prstGeom>
+          <a:noFill/>
+        </p:spPr>
+        <p:txBody>
+          <a:bodyPr wrap="square" rtlCol="0">
+            <a:spAutoFit/>
+          </a:bodyPr>
+          <a:lstStyle>
+            <a:defPPr>
+              <a:defRPr lang="en-US"/>
+            </a:defPPr>
+            <a:lvl1pPr>
+              <a:defRPr sz="1600" b="1" i="1">
+                <a:solidFill>
+                  <a:schemeClr val="accent1"/>
+                </a:solidFill>
+              </a:defRPr>
+            </a:lvl1pPr>
+          </a:lstStyle>
+          <a:p>
+            <a:r>
+              <a:rPr lang="en-US" noProof="0" dirty="0"/>
+              <a:t>Display the logfile:</a:t>
+            </a:r>
+          </a:p>
+        </p:txBody>
+      </p:sp>
+      <p:sp>
+        <p:nvSpPr>
+          <p:cNvPr id="27" name="TextBox 26">
+            <a:extLst>
+              <a:ext uri="{FF2B5EF4-FFF2-40B4-BE49-F238E27FC236}">
+                <a16:creationId xmlns:a16="http://schemas.microsoft.com/office/drawing/2014/main" id="{0EA87BDF-7A8B-CF6D-B611-F6D30AAD10A4}"/>
+              </a:ext>
+            </a:extLst>
+          </p:cNvPr>
+          <p:cNvSpPr txBox="1"/>
+          <p:nvPr/>
+        </p:nvSpPr>
+        <p:spPr>
+          <a:xfrm>
+            <a:off x="108031" y="7924314"/>
+            <a:ext cx="3183808" cy="338554"/>
+          </a:xfrm>
+          <a:prstGeom prst="rect">
+            <a:avLst/>
+          </a:prstGeom>
+          <a:noFill/>
+        </p:spPr>
+        <p:txBody>
+          <a:bodyPr wrap="square" rtlCol="0">
+            <a:spAutoFit/>
+          </a:bodyPr>
+          <a:lstStyle/>
+          <a:p>
+            <a:r>
+              <a:rPr lang="en-US" sz="1600" b="1" i="1" noProof="0" dirty="0">
+                <a:solidFill>
+                  <a:schemeClr val="accent1"/>
+                </a:solidFill>
+              </a:rPr>
+              <a:t>Display a print screen:</a:t>
+            </a:r>
+          </a:p>
+        </p:txBody>
+      </p:sp>
+      <p:pic>
+        <p:nvPicPr>
+          <p:cNvPr id="5" name="Picture 4">
+            <a:extLst>
+              <a:ext uri="{FF2B5EF4-FFF2-40B4-BE49-F238E27FC236}">
+                <a16:creationId xmlns:a16="http://schemas.microsoft.com/office/drawing/2014/main" id="{27D552E6-42E5-668F-ABF1-CB58C17145B6}"/>
+              </a:ext>
+            </a:extLst>
+          </p:cNvPr>
+          <p:cNvPicPr>
+            <a:picLocks noChangeAspect="1"/>
+          </p:cNvPicPr>
+          <p:nvPr/>
+        </p:nvPicPr>
+        <p:blipFill>
+          <a:blip r:embed="rId2"/>
+          <a:stretch>
+            <a:fillRect/>
+          </a:stretch>
+        </p:blipFill>
+        <p:spPr>
+          <a:xfrm>
+            <a:off x="123068" y="429792"/>
+            <a:ext cx="2860751" cy="2585323"/>
+          </a:xfrm>
+          <a:prstGeom prst="rect">
+            <a:avLst/>
+          </a:prstGeom>
+        </p:spPr>
+      </p:pic>
+      <p:pic>
+        <p:nvPicPr>
+          <p:cNvPr id="6" name="Picture 5">
+            <a:extLst>
+              <a:ext uri="{FF2B5EF4-FFF2-40B4-BE49-F238E27FC236}">
+                <a16:creationId xmlns:a16="http://schemas.microsoft.com/office/drawing/2014/main" id="{23A3A9BE-3D66-5498-D67B-86A8475C6074}"/>
+              </a:ext>
+            </a:extLst>
+          </p:cNvPr>
+          <p:cNvPicPr>
+            <a:picLocks noChangeAspect="1"/>
+          </p:cNvPicPr>
+          <p:nvPr/>
+        </p:nvPicPr>
+        <p:blipFill>
+          <a:blip r:embed="rId3"/>
+          <a:stretch>
+            <a:fillRect/>
+          </a:stretch>
+        </p:blipFill>
+        <p:spPr>
+          <a:xfrm>
+            <a:off x="123068" y="4346965"/>
+            <a:ext cx="6626901" cy="3380193"/>
+          </a:xfrm>
+          <a:prstGeom prst="rect">
+            <a:avLst/>
+          </a:prstGeom>
+        </p:spPr>
+      </p:pic>
+      <p:pic>
+        <p:nvPicPr>
+          <p:cNvPr id="9" name="Picture 8">
+            <a:extLst>
+              <a:ext uri="{FF2B5EF4-FFF2-40B4-BE49-F238E27FC236}">
+                <a16:creationId xmlns:a16="http://schemas.microsoft.com/office/drawing/2014/main" id="{4B470A2C-AF6B-5B42-BA54-DEB1D930A08F}"/>
+              </a:ext>
+            </a:extLst>
+          </p:cNvPr>
+          <p:cNvPicPr>
+            <a:picLocks noChangeAspect="1"/>
+          </p:cNvPicPr>
+          <p:nvPr/>
+        </p:nvPicPr>
+        <p:blipFill>
+          <a:blip r:embed="rId4"/>
+          <a:stretch>
+            <a:fillRect/>
+          </a:stretch>
+        </p:blipFill>
+        <p:spPr>
+          <a:xfrm>
+            <a:off x="123067" y="8351871"/>
+            <a:ext cx="6626901" cy="3483259"/>
+          </a:xfrm>
+          <a:prstGeom prst="rect">
+            <a:avLst/>
+          </a:prstGeom>
+        </p:spPr>
+      </p:pic>
+      <p:pic>
+        <p:nvPicPr>
+          <p:cNvPr id="14" name="Picture 13">
+            <a:extLst>
+              <a:ext uri="{FF2B5EF4-FFF2-40B4-BE49-F238E27FC236}">
+                <a16:creationId xmlns:a16="http://schemas.microsoft.com/office/drawing/2014/main" id="{30C50267-0BA8-DD9F-150E-8280C639C201}"/>
+              </a:ext>
+            </a:extLst>
+          </p:cNvPr>
+          <p:cNvPicPr>
+            <a:picLocks noChangeAspect="1"/>
+          </p:cNvPicPr>
+          <p:nvPr/>
+        </p:nvPicPr>
+        <p:blipFill>
+          <a:blip r:embed="rId5"/>
+          <a:stretch>
+            <a:fillRect/>
+          </a:stretch>
+        </p:blipFill>
+        <p:spPr>
+          <a:xfrm>
+            <a:off x="4578413" y="5097881"/>
+            <a:ext cx="1924069" cy="1429661"/>
+          </a:xfrm>
+          <a:prstGeom prst="rect">
+            <a:avLst/>
+          </a:prstGeom>
+          <a:solidFill>
+            <a:srgbClr val="FFFFFF">
+              <a:shade val="85000"/>
+            </a:srgbClr>
+          </a:solidFill>
+          <a:ln w="88900" cap="sq">
+            <a:solidFill>
+              <a:srgbClr val="FFFFFF"/>
+            </a:solidFill>
+            <a:miter lim="800000"/>
+          </a:ln>
+          <a:effectLst>
+            <a:outerShdw blurRad="55000" dist="18000" dir="5400000" algn="tl" rotWithShape="0">
+              <a:srgbClr val="000000">
+                <a:alpha val="40000"/>
+              </a:srgbClr>
+            </a:outerShdw>
+          </a:effectLst>
+          <a:scene3d>
+            <a:camera prst="orthographicFront"/>
+            <a:lightRig rig="twoPt" dir="t">
+              <a:rot lat="0" lon="0" rev="7200000"/>
+            </a:lightRig>
+          </a:scene3d>
+          <a:sp3d>
+            <a:bevelT w="25400" h="19050"/>
+            <a:contourClr>
+              <a:srgbClr val="FFFFFF"/>
+            </a:contourClr>
+          </a:sp3d>
+        </p:spPr>
+      </p:pic>
+      <p:cxnSp>
+        <p:nvCxnSpPr>
+          <p:cNvPr id="17" name="Straight Arrow Connector 16">
+            <a:extLst>
+              <a:ext uri="{FF2B5EF4-FFF2-40B4-BE49-F238E27FC236}">
+                <a16:creationId xmlns:a16="http://schemas.microsoft.com/office/drawing/2014/main" id="{FD1F4295-C1B3-6A8A-F6E2-6D728D4124A8}"/>
+              </a:ext>
+            </a:extLst>
+          </p:cNvPr>
+          <p:cNvCxnSpPr/>
+          <p:nvPr/>
+        </p:nvCxnSpPr>
+        <p:spPr>
+          <a:xfrm>
+            <a:off x="2983819" y="4060702"/>
+            <a:ext cx="0" cy="739898"/>
+          </a:xfrm>
+          <a:prstGeom prst="straightConnector1">
+            <a:avLst/>
+          </a:prstGeom>
+          <a:ln>
+            <a:tailEnd type="triangle"/>
+          </a:ln>
+        </p:spPr>
+        <p:style>
+          <a:lnRef idx="2">
+            <a:schemeClr val="accent6"/>
+          </a:lnRef>
+          <a:fillRef idx="0">
+            <a:schemeClr val="accent6"/>
+          </a:fillRef>
+          <a:effectRef idx="1">
+            <a:schemeClr val="accent6"/>
+          </a:effectRef>
+          <a:fontRef idx="minor">
+            <a:schemeClr val="tx1"/>
+          </a:fontRef>
+        </p:style>
+      </p:cxnSp>
+      <p:cxnSp>
+        <p:nvCxnSpPr>
+          <p:cNvPr id="19" name="Straight Arrow Connector 18">
+            <a:extLst>
+              <a:ext uri="{FF2B5EF4-FFF2-40B4-BE49-F238E27FC236}">
+                <a16:creationId xmlns:a16="http://schemas.microsoft.com/office/drawing/2014/main" id="{42B3978C-3DDC-0C93-99F8-F5A4D25FA966}"/>
+              </a:ext>
+            </a:extLst>
+          </p:cNvPr>
+          <p:cNvCxnSpPr>
+            <a:endCxn id="14" idx="0"/>
+          </p:cNvCxnSpPr>
+          <p:nvPr/>
+        </p:nvCxnSpPr>
+        <p:spPr>
+          <a:xfrm>
+            <a:off x="4082143" y="4060702"/>
+            <a:ext cx="1458305" cy="1037179"/>
+          </a:xfrm>
+          <a:prstGeom prst="straightConnector1">
+            <a:avLst/>
+          </a:prstGeom>
+          <a:ln>
+            <a:tailEnd type="triangle"/>
+          </a:ln>
+        </p:spPr>
+        <p:style>
+          <a:lnRef idx="2">
+            <a:schemeClr val="accent6"/>
+          </a:lnRef>
+          <a:fillRef idx="0">
+            <a:schemeClr val="accent6"/>
+          </a:fillRef>
+          <a:effectRef idx="1">
+            <a:schemeClr val="accent6"/>
+          </a:effectRef>
+          <a:fontRef idx="minor">
+            <a:schemeClr val="tx1"/>
+          </a:fontRef>
+        </p:style>
+      </p:cxnSp>
+    </p:spTree>
+    <p:extLst>
+      <p:ext uri="{BB962C8B-B14F-4D97-AF65-F5344CB8AC3E}">
+        <p14:creationId xmlns:p14="http://schemas.microsoft.com/office/powerpoint/2010/main" val="2142157388"/>
+      </p:ext>
+    </p:extLst>
+  </p:cSld>
+  <p:clrMapOvr>
+    <a:masterClrMapping/>
+  </p:clrMapOvr>
+</p:sld>
+</file>
+
+<file path=ppt/slides/slide7.xml><?xml version="1.0" encoding="utf-8"?>
+<p:sld xmlns:a="http://schemas.openxmlformats.org/drawingml/2006/main" xmlns:r="http://schemas.openxmlformats.org/officeDocument/2006/relationships" xmlns:p="http://schemas.openxmlformats.org/presentationml/2006/main">
+  <p:cSld>
+    <p:spTree>
+      <p:nvGrpSpPr>
+        <p:cNvPr id="1" name="">
+          <a:extLst>
+            <a:ext uri="{FF2B5EF4-FFF2-40B4-BE49-F238E27FC236}">
+              <a16:creationId xmlns:a16="http://schemas.microsoft.com/office/drawing/2014/main" id="{ADD1CFDD-5FF7-12C8-73CF-EBB21159A268}"/>
+            </a:ext>
+          </a:extLst>
+        </p:cNvPr>
+        <p:cNvGrpSpPr/>
+        <p:nvPr/>
+      </p:nvGrpSpPr>
+      <p:grpSpPr>
+        <a:xfrm>
+          <a:off x="0" y="0"/>
+          <a:ext cx="0" cy="0"/>
+          <a:chOff x="0" y="0"/>
+          <a:chExt cx="0" cy="0"/>
+        </a:xfrm>
+      </p:grpSpPr>
+      <p:sp>
+        <p:nvSpPr>
+          <p:cNvPr id="4" name="Rectangle 3">
+            <a:extLst>
+              <a:ext uri="{FF2B5EF4-FFF2-40B4-BE49-F238E27FC236}">
+                <a16:creationId xmlns:a16="http://schemas.microsoft.com/office/drawing/2014/main" id="{94DFAE0C-794A-D0D5-490D-F6CF974225F3}"/>
+              </a:ext>
+            </a:extLst>
+          </p:cNvPr>
+          <p:cNvSpPr/>
+          <p:nvPr/>
+        </p:nvSpPr>
+        <p:spPr>
+          <a:xfrm>
+            <a:off x="0" y="312821"/>
+            <a:ext cx="6858000" cy="2960731"/>
+          </a:xfrm>
+          <a:prstGeom prst="rect">
+            <a:avLst/>
+          </a:prstGeom>
+          <a:solidFill>
+            <a:srgbClr val="D4EDF8"/>
+          </a:solidFill>
+          <a:ln>
+            <a:noFill/>
+          </a:ln>
+        </p:spPr>
+        <p:style>
+          <a:lnRef idx="2">
+            <a:schemeClr val="accent1">
+              <a:shade val="15000"/>
+            </a:schemeClr>
+          </a:lnRef>
+          <a:fillRef idx="1">
+            <a:schemeClr val="accent1"/>
+          </a:fillRef>
+          <a:effectRef idx="0">
+            <a:schemeClr val="accent1"/>
+          </a:effectRef>
+          <a:fontRef idx="minor">
+            <a:schemeClr val="lt1"/>
+          </a:fontRef>
+        </p:style>
+        <p:txBody>
+          <a:bodyPr rtlCol="0" anchor="ctr"/>
+          <a:lstStyle/>
+          <a:p>
+            <a:pPr algn="ctr"/>
+            <a:endParaRPr lang="fr-BE"/>
+          </a:p>
+        </p:txBody>
+      </p:sp>
+      <p:sp>
+        <p:nvSpPr>
+          <p:cNvPr id="10" name="Rectangle 9">
+            <a:extLst>
+              <a:ext uri="{FF2B5EF4-FFF2-40B4-BE49-F238E27FC236}">
+                <a16:creationId xmlns:a16="http://schemas.microsoft.com/office/drawing/2014/main" id="{FF62D560-2EEA-3536-92B8-6A93C0F4C95C}"/>
+              </a:ext>
+            </a:extLst>
+          </p:cNvPr>
+          <p:cNvSpPr/>
+          <p:nvPr/>
+        </p:nvSpPr>
+        <p:spPr>
+          <a:xfrm>
+            <a:off x="256032" y="0"/>
+            <a:ext cx="2779776" cy="312821"/>
+          </a:xfrm>
+          <a:prstGeom prst="rect">
+            <a:avLst/>
+          </a:prstGeom>
+          <a:solidFill>
+            <a:schemeClr val="bg1">
+              <a:lumMod val="85000"/>
+            </a:schemeClr>
+          </a:solidFill>
+          <a:ln>
+            <a:noFill/>
+          </a:ln>
+        </p:spPr>
+        <p:style>
+          <a:lnRef idx="2">
+            <a:schemeClr val="accent1">
+              <a:shade val="15000"/>
+            </a:schemeClr>
+          </a:lnRef>
+          <a:fillRef idx="1">
+            <a:schemeClr val="accent1"/>
+          </a:fillRef>
+          <a:effectRef idx="0">
+            <a:schemeClr val="accent1"/>
+          </a:effectRef>
+          <a:fontRef idx="minor">
+            <a:schemeClr val="lt1"/>
+          </a:fontRef>
+        </p:style>
+        <p:txBody>
+          <a:bodyPr rtlCol="0" anchor="ctr"/>
+          <a:lstStyle/>
+          <a:p>
+            <a:pPr algn="ctr"/>
+            <a:endParaRPr lang="fr-BE"/>
+          </a:p>
+        </p:txBody>
+      </p:sp>
+      <p:sp>
+        <p:nvSpPr>
+          <p:cNvPr id="13" name="TextBox 12">
+            <a:extLst>
+              <a:ext uri="{FF2B5EF4-FFF2-40B4-BE49-F238E27FC236}">
                 <a16:creationId xmlns:a16="http://schemas.microsoft.com/office/drawing/2014/main" id="{BA185FC8-7E42-0F4C-942B-9A89AAA5B6E0}"/>
               </a:ext>
             </a:extLst>
@@ -6665,7 +7280,7 @@
 </p:sld>
 </file>
 
-<file path=ppt/slides/slide7.xml><?xml version="1.0" encoding="utf-8"?>
+<file path=ppt/slides/slide8.xml><?xml version="1.0" encoding="utf-8"?>
 <p:sld xmlns:a="http://schemas.openxmlformats.org/drawingml/2006/main" xmlns:r="http://schemas.openxmlformats.org/officeDocument/2006/relationships" xmlns:p="http://schemas.openxmlformats.org/presentationml/2006/main">
   <p:cSld>
     <p:spTree>
